--- a/assets/HackfiniX Template.pptx
+++ b/assets/HackfiniX Template.pptx
@@ -12,7 +12,6 @@
     <p:sldId id="259" r:id="rId6"/>
     <p:sldId id="260" r:id="rId7"/>
     <p:sldId id="261" r:id="rId8"/>
-    <p:sldId id="263" r:id="rId9"/>
   </p:sldIdLst>
   <p:sldSz cx="12192000" cy="6858000"/>
   <p:notesSz cx="6858000" cy="9144000"/>
@@ -718,7 +717,7 @@
           <a:p>
             <a:fld id="{E5CC4EB7-DA4B-450B-9A47-9F5BFAF8F272}" type="datetimeFigureOut">
               <a:rPr lang="en-US" smtClean="0"/>
-              <a:t>4/1/2026</a:t>
+              <a:t>4/8/2026</a:t>
             </a:fld>
             <a:endParaRPr lang="en-US"/>
           </a:p>
@@ -916,7 +915,7 @@
           <a:p>
             <a:fld id="{E5CC4EB7-DA4B-450B-9A47-9F5BFAF8F272}" type="datetimeFigureOut">
               <a:rPr lang="en-US" smtClean="0"/>
-              <a:t>4/1/2026</a:t>
+              <a:t>4/8/2026</a:t>
             </a:fld>
             <a:endParaRPr lang="en-US"/>
           </a:p>
@@ -1124,7 +1123,7 @@
           <a:p>
             <a:fld id="{E5CC4EB7-DA4B-450B-9A47-9F5BFAF8F272}" type="datetimeFigureOut">
               <a:rPr lang="en-US" smtClean="0"/>
-              <a:t>4/1/2026</a:t>
+              <a:t>4/8/2026</a:t>
             </a:fld>
             <a:endParaRPr lang="en-US"/>
           </a:p>
@@ -1322,7 +1321,7 @@
           <a:p>
             <a:fld id="{E5CC4EB7-DA4B-450B-9A47-9F5BFAF8F272}" type="datetimeFigureOut">
               <a:rPr lang="en-US" smtClean="0"/>
-              <a:t>4/1/2026</a:t>
+              <a:t>4/8/2026</a:t>
             </a:fld>
             <a:endParaRPr lang="en-US"/>
           </a:p>
@@ -1597,7 +1596,7 @@
           <a:p>
             <a:fld id="{E5CC4EB7-DA4B-450B-9A47-9F5BFAF8F272}" type="datetimeFigureOut">
               <a:rPr lang="en-US" smtClean="0"/>
-              <a:t>4/1/2026</a:t>
+              <a:t>4/8/2026</a:t>
             </a:fld>
             <a:endParaRPr lang="en-US"/>
           </a:p>
@@ -1862,7 +1861,7 @@
           <a:p>
             <a:fld id="{E5CC4EB7-DA4B-450B-9A47-9F5BFAF8F272}" type="datetimeFigureOut">
               <a:rPr lang="en-US" smtClean="0"/>
-              <a:t>4/1/2026</a:t>
+              <a:t>4/8/2026</a:t>
             </a:fld>
             <a:endParaRPr lang="en-US"/>
           </a:p>
@@ -2274,7 +2273,7 @@
           <a:p>
             <a:fld id="{E5CC4EB7-DA4B-450B-9A47-9F5BFAF8F272}" type="datetimeFigureOut">
               <a:rPr lang="en-US" smtClean="0"/>
-              <a:t>4/1/2026</a:t>
+              <a:t>4/8/2026</a:t>
             </a:fld>
             <a:endParaRPr lang="en-US"/>
           </a:p>
@@ -2415,7 +2414,7 @@
           <a:p>
             <a:fld id="{E5CC4EB7-DA4B-450B-9A47-9F5BFAF8F272}" type="datetimeFigureOut">
               <a:rPr lang="en-US" smtClean="0"/>
-              <a:t>4/1/2026</a:t>
+              <a:t>4/8/2026</a:t>
             </a:fld>
             <a:endParaRPr lang="en-US"/>
           </a:p>
@@ -2528,7 +2527,7 @@
           <a:p>
             <a:fld id="{E5CC4EB7-DA4B-450B-9A47-9F5BFAF8F272}" type="datetimeFigureOut">
               <a:rPr lang="en-US" smtClean="0"/>
-              <a:t>4/1/2026</a:t>
+              <a:t>4/8/2026</a:t>
             </a:fld>
             <a:endParaRPr lang="en-US"/>
           </a:p>
@@ -2839,7 +2838,7 @@
           <a:p>
             <a:fld id="{E5CC4EB7-DA4B-450B-9A47-9F5BFAF8F272}" type="datetimeFigureOut">
               <a:rPr lang="en-US" smtClean="0"/>
-              <a:t>4/1/2026</a:t>
+              <a:t>4/8/2026</a:t>
             </a:fld>
             <a:endParaRPr lang="en-US"/>
           </a:p>
@@ -3127,7 +3126,7 @@
           <a:p>
             <a:fld id="{E5CC4EB7-DA4B-450B-9A47-9F5BFAF8F272}" type="datetimeFigureOut">
               <a:rPr lang="en-US" smtClean="0"/>
-              <a:t>4/1/2026</a:t>
+              <a:t>4/8/2026</a:t>
             </a:fld>
             <a:endParaRPr lang="en-US"/>
           </a:p>
@@ -3368,7 +3367,7 @@
           <a:p>
             <a:fld id="{E5CC4EB7-DA4B-450B-9A47-9F5BFAF8F272}" type="datetimeFigureOut">
               <a:rPr lang="en-US" smtClean="0"/>
-              <a:t>4/1/2026</a:t>
+              <a:t>4/8/2026</a:t>
             </a:fld>
             <a:endParaRPr lang="en-US"/>
           </a:p>
@@ -4934,7 +4933,7 @@
             </a:r>
             <a:r>
               <a:rPr lang="en-US" sz="1600" b="1" dirty="0" err="1"/>
-              <a:t>Hackfinity</a:t>
+              <a:t>HackfiniX</a:t>
             </a:r>
             <a:r>
               <a:rPr lang="en-US" sz="1600" b="1" dirty="0"/>
@@ -4954,7 +4953,7 @@
             </a:r>
             <a:r>
               <a:rPr lang="en-US" sz="1600" dirty="0"/>
-              <a:t>22 April, 2026 (11:59 PM).</a:t>
+              <a:t>30 April, 2026 (11:59 PM).</a:t>
             </a:r>
           </a:p>
           <a:p>
@@ -4982,17 +4981,6 @@
             <a:r>
               <a:rPr lang="en-US" sz="1600" b="1" dirty="0"/>
               <a:t>up to 02 ideas only.</a:t>
-            </a:r>
-          </a:p>
-          <a:p>
-            <a:pPr>
-              <a:spcBef>
-                <a:spcPts val="0"/>
-              </a:spcBef>
-            </a:pPr>
-            <a:r>
-              <a:rPr lang="en-US" sz="1600" dirty="0"/>
-              <a:t>Both ideas must be included in the same PPT file. </a:t>
             </a:r>
           </a:p>
           <a:p>
@@ -6415,291 +6403,6 @@
     <p:extLst>
       <p:ext uri="{BB962C8B-B14F-4D97-AF65-F5344CB8AC3E}">
         <p14:creationId xmlns:p14="http://schemas.microsoft.com/office/powerpoint/2010/main" val="1364335801"/>
-      </p:ext>
-    </p:extLst>
-  </p:cSld>
-  <p:clrMapOvr>
-    <a:masterClrMapping/>
-  </p:clrMapOvr>
-</p:sld>
-</file>
-
-<file path=ppt/slides/slide8.xml><?xml version="1.0" encoding="utf-8"?>
-<p:sld xmlns:a="http://schemas.openxmlformats.org/drawingml/2006/main" xmlns:r="http://schemas.openxmlformats.org/officeDocument/2006/relationships" xmlns:p="http://schemas.openxmlformats.org/presentationml/2006/main">
-  <p:cSld>
-    <p:spTree>
-      <p:nvGrpSpPr>
-        <p:cNvPr id="1" name="">
-          <a:extLst>
-            <a:ext uri="{FF2B5EF4-FFF2-40B4-BE49-F238E27FC236}">
-              <a16:creationId xmlns:a16="http://schemas.microsoft.com/office/drawing/2014/main" id="{E40954F7-F2BF-5847-9956-7DFBA4A16D68}"/>
-            </a:ext>
-          </a:extLst>
-        </p:cNvPr>
-        <p:cNvGrpSpPr/>
-        <p:nvPr/>
-      </p:nvGrpSpPr>
-      <p:grpSpPr>
-        <a:xfrm>
-          <a:off x="0" y="0"/>
-          <a:ext cx="0" cy="0"/>
-          <a:chOff x="0" y="0"/>
-          <a:chExt cx="0" cy="0"/>
-        </a:xfrm>
-      </p:grpSpPr>
-      <p:sp>
-        <p:nvSpPr>
-          <p:cNvPr id="2" name="Title 1">
-            <a:extLst>
-              <a:ext uri="{FF2B5EF4-FFF2-40B4-BE49-F238E27FC236}">
-                <a16:creationId xmlns:a16="http://schemas.microsoft.com/office/drawing/2014/main" id="{81E16C3C-2DB7-53F0-DCC5-2C186B0651F9}"/>
-              </a:ext>
-            </a:extLst>
-          </p:cNvPr>
-          <p:cNvSpPr>
-            <a:spLocks noGrp="1"/>
-          </p:cNvSpPr>
-          <p:nvPr>
-            <p:ph type="title"/>
-          </p:nvPr>
-        </p:nvSpPr>
-        <p:spPr>
-          <a:xfrm>
-            <a:off x="901405" y="636238"/>
-            <a:ext cx="11059427" cy="1009651"/>
-          </a:xfrm>
-        </p:spPr>
-        <p:txBody>
-          <a:bodyPr/>
-          <a:lstStyle/>
-          <a:p>
-            <a:pPr algn="ctr"/>
-            <a:r>
-              <a:rPr lang="en-US" b="1" dirty="0">
-                <a:latin typeface="+mn-lt"/>
-              </a:rPr>
-              <a:t>Problem Title </a:t>
-            </a:r>
-          </a:p>
-        </p:txBody>
-      </p:sp>
-      <p:sp>
-        <p:nvSpPr>
-          <p:cNvPr id="3" name="Content Placeholder 2">
-            <a:extLst>
-              <a:ext uri="{FF2B5EF4-FFF2-40B4-BE49-F238E27FC236}">
-                <a16:creationId xmlns:a16="http://schemas.microsoft.com/office/drawing/2014/main" id="{42F30B3E-E59B-C8DE-BC1C-6F74D11AB6D8}"/>
-              </a:ext>
-            </a:extLst>
-          </p:cNvPr>
-          <p:cNvSpPr>
-            <a:spLocks noGrp="1"/>
-          </p:cNvSpPr>
-          <p:nvPr>
-            <p:ph idx="1"/>
-          </p:nvPr>
-        </p:nvSpPr>
-        <p:spPr>
-          <a:xfrm>
-            <a:off x="837398" y="1825625"/>
-            <a:ext cx="11059426" cy="4351338"/>
-          </a:xfrm>
-        </p:spPr>
-        <p:txBody>
-          <a:bodyPr/>
-          <a:lstStyle/>
-          <a:p>
-            <a:r>
-              <a:rPr lang="en-US" sz="2000" b="1" dirty="0"/>
-              <a:t>Start of Idea 02 submission (Discard this slide if submitting just 01 idea)</a:t>
-            </a:r>
-          </a:p>
-          <a:p>
-            <a:r>
-              <a:rPr lang="en-US" sz="2000" dirty="0"/>
-              <a:t>The same slide count rules apply for idea 02 (</a:t>
-            </a:r>
-            <a:r>
-              <a:rPr lang="en-US" sz="2000"/>
-              <a:t>if submitting)</a:t>
-            </a:r>
-            <a:r>
-              <a:rPr lang="en-US" sz="2000" b="1"/>
-              <a:t> </a:t>
-            </a:r>
-            <a:endParaRPr lang="en-US" sz="2000" b="1" dirty="0"/>
-          </a:p>
-          <a:p>
-            <a:pPr marL="0" indent="0">
-              <a:buNone/>
-            </a:pPr>
-            <a:endParaRPr lang="en-US" dirty="0"/>
-          </a:p>
-          <a:p>
-            <a:pPr marL="0" indent="0">
-              <a:buNone/>
-            </a:pPr>
-            <a:r>
-              <a:rPr lang="en-US" dirty="0"/>
-              <a:t>Clearly describe the problem you are trying to solve.</a:t>
-            </a:r>
-          </a:p>
-        </p:txBody>
-      </p:sp>
-      <p:sp>
-        <p:nvSpPr>
-          <p:cNvPr id="4" name="Rectangle 3">
-            <a:extLst>
-              <a:ext uri="{FF2B5EF4-FFF2-40B4-BE49-F238E27FC236}">
-                <a16:creationId xmlns:a16="http://schemas.microsoft.com/office/drawing/2014/main" id="{09621514-9DA1-70CF-E187-1CEF7EDED9B9}"/>
-              </a:ext>
-            </a:extLst>
-          </p:cNvPr>
-          <p:cNvSpPr/>
-          <p:nvPr/>
-        </p:nvSpPr>
-        <p:spPr>
-          <a:xfrm>
-            <a:off x="0" y="0"/>
-            <a:ext cx="673768" cy="6858000"/>
-          </a:xfrm>
-          <a:prstGeom prst="rect">
-            <a:avLst/>
-          </a:prstGeom>
-          <a:solidFill>
-            <a:schemeClr val="accent1">
-              <a:lumMod val="75000"/>
-            </a:schemeClr>
-          </a:solidFill>
-          <a:ln>
-            <a:solidFill>
-              <a:schemeClr val="accent1">
-                <a:lumMod val="75000"/>
-              </a:schemeClr>
-            </a:solidFill>
-          </a:ln>
-        </p:spPr>
-        <p:style>
-          <a:lnRef idx="2">
-            <a:schemeClr val="accent1">
-              <a:shade val="15000"/>
-            </a:schemeClr>
-          </a:lnRef>
-          <a:fillRef idx="1">
-            <a:schemeClr val="accent1"/>
-          </a:fillRef>
-          <a:effectRef idx="0">
-            <a:schemeClr val="accent1"/>
-          </a:effectRef>
-          <a:fontRef idx="minor">
-            <a:schemeClr val="lt1"/>
-          </a:fontRef>
-        </p:style>
-        <p:txBody>
-          <a:bodyPr rtlCol="0" anchor="ctr"/>
-          <a:lstStyle/>
-          <a:p>
-            <a:pPr algn="ctr"/>
-            <a:endParaRPr lang="en-US"/>
-          </a:p>
-        </p:txBody>
-      </p:sp>
-      <p:sp>
-        <p:nvSpPr>
-          <p:cNvPr id="11" name="Title 1">
-            <a:extLst>
-              <a:ext uri="{FF2B5EF4-FFF2-40B4-BE49-F238E27FC236}">
-                <a16:creationId xmlns:a16="http://schemas.microsoft.com/office/drawing/2014/main" id="{F12CE883-E028-1F88-0697-3F19D016F482}"/>
-              </a:ext>
-            </a:extLst>
-          </p:cNvPr>
-          <p:cNvSpPr txBox="1">
-            <a:spLocks/>
-          </p:cNvSpPr>
-          <p:nvPr/>
-        </p:nvSpPr>
-        <p:spPr>
-          <a:xfrm rot="10800000" flipV="1">
-            <a:off x="837397" y="209899"/>
-            <a:ext cx="7175795" cy="403669"/>
-          </a:xfrm>
-          <a:prstGeom prst="rect">
-            <a:avLst/>
-          </a:prstGeom>
-        </p:spPr>
-        <p:txBody>
-          <a:bodyPr vert="horz" lIns="91440" tIns="45720" rIns="91440" bIns="45720" rtlCol="0" anchor="ctr">
-            <a:normAutofit fontScale="55000" lnSpcReduction="20000"/>
-          </a:bodyPr>
-          <a:lstStyle>
-            <a:lvl1pPr algn="l" defTabSz="914400" rtl="0" eaLnBrk="1" latinLnBrk="0" hangingPunct="1">
-              <a:lnSpc>
-                <a:spcPct val="90000"/>
-              </a:lnSpc>
-              <a:spcBef>
-                <a:spcPct val="0"/>
-              </a:spcBef>
-              <a:buNone/>
-              <a:defRPr sz="4400" kern="1200">
-                <a:solidFill>
-                  <a:schemeClr val="tx1"/>
-                </a:solidFill>
-                <a:latin typeface="+mj-lt"/>
-                <a:ea typeface="+mj-ea"/>
-                <a:cs typeface="+mj-cs"/>
-              </a:defRPr>
-            </a:lvl1pPr>
-          </a:lstStyle>
-          <a:p>
-            <a:r>
-              <a:rPr lang="en-US" b="1" dirty="0">
-                <a:latin typeface="+mn-lt"/>
-              </a:rPr>
-              <a:t>Track:</a:t>
-            </a:r>
-          </a:p>
-        </p:txBody>
-      </p:sp>
-      <p:pic>
-        <p:nvPicPr>
-          <p:cNvPr id="5" name="Picture 4">
-            <a:extLst>
-              <a:ext uri="{FF2B5EF4-FFF2-40B4-BE49-F238E27FC236}">
-                <a16:creationId xmlns:a16="http://schemas.microsoft.com/office/drawing/2014/main" id="{71F6AA2E-3F73-7A8F-56DB-185232197633}"/>
-              </a:ext>
-            </a:extLst>
-          </p:cNvPr>
-          <p:cNvPicPr>
-            <a:picLocks noChangeAspect="1"/>
-          </p:cNvPicPr>
-          <p:nvPr/>
-        </p:nvPicPr>
-        <p:blipFill>
-          <a:blip r:embed="rId2">
-            <a:extLst>
-              <a:ext uri="{28A0092B-C50C-407E-A947-70E740481C1C}">
-                <a14:useLocalDpi xmlns:a14="http://schemas.microsoft.com/office/drawing/2010/main" val="0"/>
-              </a:ext>
-            </a:extLst>
-          </a:blip>
-          <a:stretch>
-            <a:fillRect/>
-          </a:stretch>
-        </p:blipFill>
-        <p:spPr>
-          <a:xfrm>
-            <a:off x="53252" y="36859"/>
-            <a:ext cx="567263" cy="563397"/>
-          </a:xfrm>
-          <a:prstGeom prst="rect">
-            <a:avLst/>
-          </a:prstGeom>
-        </p:spPr>
-      </p:pic>
-    </p:spTree>
-    <p:extLst>
-      <p:ext uri="{BB962C8B-B14F-4D97-AF65-F5344CB8AC3E}">
-        <p14:creationId xmlns:p14="http://schemas.microsoft.com/office/powerpoint/2010/main" val="3820689868"/>
       </p:ext>
     </p:extLst>
   </p:cSld>

--- a/assets/HackfiniX Template.pptx
+++ b/assets/HackfiniX Template.pptx
@@ -717,7 +717,7 @@
           <a:p>
             <a:fld id="{E5CC4EB7-DA4B-450B-9A47-9F5BFAF8F272}" type="datetimeFigureOut">
               <a:rPr lang="en-US" smtClean="0"/>
-              <a:t>4/8/2026</a:t>
+              <a:t>6/24/2026</a:t>
             </a:fld>
             <a:endParaRPr lang="en-US"/>
           </a:p>
@@ -915,7 +915,7 @@
           <a:p>
             <a:fld id="{E5CC4EB7-DA4B-450B-9A47-9F5BFAF8F272}" type="datetimeFigureOut">
               <a:rPr lang="en-US" smtClean="0"/>
-              <a:t>4/8/2026</a:t>
+              <a:t>6/24/2026</a:t>
             </a:fld>
             <a:endParaRPr lang="en-US"/>
           </a:p>
@@ -1123,7 +1123,7 @@
           <a:p>
             <a:fld id="{E5CC4EB7-DA4B-450B-9A47-9F5BFAF8F272}" type="datetimeFigureOut">
               <a:rPr lang="en-US" smtClean="0"/>
-              <a:t>4/8/2026</a:t>
+              <a:t>6/24/2026</a:t>
             </a:fld>
             <a:endParaRPr lang="en-US"/>
           </a:p>
@@ -1321,7 +1321,7 @@
           <a:p>
             <a:fld id="{E5CC4EB7-DA4B-450B-9A47-9F5BFAF8F272}" type="datetimeFigureOut">
               <a:rPr lang="en-US" smtClean="0"/>
-              <a:t>4/8/2026</a:t>
+              <a:t>6/24/2026</a:t>
             </a:fld>
             <a:endParaRPr lang="en-US"/>
           </a:p>
@@ -1596,7 +1596,7 @@
           <a:p>
             <a:fld id="{E5CC4EB7-DA4B-450B-9A47-9F5BFAF8F272}" type="datetimeFigureOut">
               <a:rPr lang="en-US" smtClean="0"/>
-              <a:t>4/8/2026</a:t>
+              <a:t>6/24/2026</a:t>
             </a:fld>
             <a:endParaRPr lang="en-US"/>
           </a:p>
@@ -1861,7 +1861,7 @@
           <a:p>
             <a:fld id="{E5CC4EB7-DA4B-450B-9A47-9F5BFAF8F272}" type="datetimeFigureOut">
               <a:rPr lang="en-US" smtClean="0"/>
-              <a:t>4/8/2026</a:t>
+              <a:t>6/24/2026</a:t>
             </a:fld>
             <a:endParaRPr lang="en-US"/>
           </a:p>
@@ -2273,7 +2273,7 @@
           <a:p>
             <a:fld id="{E5CC4EB7-DA4B-450B-9A47-9F5BFAF8F272}" type="datetimeFigureOut">
               <a:rPr lang="en-US" smtClean="0"/>
-              <a:t>4/8/2026</a:t>
+              <a:t>6/24/2026</a:t>
             </a:fld>
             <a:endParaRPr lang="en-US"/>
           </a:p>
@@ -2414,7 +2414,7 @@
           <a:p>
             <a:fld id="{E5CC4EB7-DA4B-450B-9A47-9F5BFAF8F272}" type="datetimeFigureOut">
               <a:rPr lang="en-US" smtClean="0"/>
-              <a:t>4/8/2026</a:t>
+              <a:t>6/24/2026</a:t>
             </a:fld>
             <a:endParaRPr lang="en-US"/>
           </a:p>
@@ -2527,7 +2527,7 @@
           <a:p>
             <a:fld id="{E5CC4EB7-DA4B-450B-9A47-9F5BFAF8F272}" type="datetimeFigureOut">
               <a:rPr lang="en-US" smtClean="0"/>
-              <a:t>4/8/2026</a:t>
+              <a:t>6/24/2026</a:t>
             </a:fld>
             <a:endParaRPr lang="en-US"/>
           </a:p>
@@ -2838,7 +2838,7 @@
           <a:p>
             <a:fld id="{E5CC4EB7-DA4B-450B-9A47-9F5BFAF8F272}" type="datetimeFigureOut">
               <a:rPr lang="en-US" smtClean="0"/>
-              <a:t>4/8/2026</a:t>
+              <a:t>6/24/2026</a:t>
             </a:fld>
             <a:endParaRPr lang="en-US"/>
           </a:p>
@@ -3126,7 +3126,7 @@
           <a:p>
             <a:fld id="{E5CC4EB7-DA4B-450B-9A47-9F5BFAF8F272}" type="datetimeFigureOut">
               <a:rPr lang="en-US" smtClean="0"/>
-              <a:t>4/8/2026</a:t>
+              <a:t>6/24/2026</a:t>
             </a:fld>
             <a:endParaRPr lang="en-US"/>
           </a:p>
@@ -3367,7 +3367,7 @@
           <a:p>
             <a:fld id="{E5CC4EB7-DA4B-450B-9A47-9F5BFAF8F272}" type="datetimeFigureOut">
               <a:rPr lang="en-US" smtClean="0"/>
-              <a:t>4/8/2026</a:t>
+              <a:t>6/24/2026</a:t>
             </a:fld>
             <a:endParaRPr lang="en-US"/>
           </a:p>
@@ -4929,15 +4929,11 @@
             </a:r>
             <a:r>
               <a:rPr lang="en-US" sz="1600" dirty="0"/>
-              <a:t>Submit your PPT via the </a:t>
-            </a:r>
-            <a:r>
-              <a:rPr lang="en-US" sz="1600" b="1" dirty="0" err="1"/>
-              <a:t>HackfiniX</a:t>
+              <a:t>Submit your Idea PDF via Email to drsugumar.ece.nc@cambridge.edu.in</a:t>
             </a:r>
             <a:r>
               <a:rPr lang="en-US" sz="1600" b="1" dirty="0"/>
-              <a:t> 2026 microsite on Unstop.</a:t>
+              <a:t>.</a:t>
             </a:r>
             <a:endParaRPr lang="en-US" sz="1600" dirty="0"/>
           </a:p>
@@ -4953,7 +4949,7 @@
             </a:r>
             <a:r>
               <a:rPr lang="en-US" sz="1600" dirty="0"/>
-              <a:t>30 April, 2026 (11:59 PM).</a:t>
+              <a:t>05 July, 2026 (11:59 PM).</a:t>
             </a:r>
           </a:p>
           <a:p>
@@ -5491,8 +5487,8 @@
         </p:nvSpPr>
         <p:spPr>
           <a:xfrm rot="10800000" flipV="1">
-            <a:off x="837397" y="209899"/>
-            <a:ext cx="7175795" cy="403669"/>
+            <a:off x="837396" y="209899"/>
+            <a:ext cx="7447067" cy="640493"/>
           </a:xfrm>
           <a:prstGeom prst="rect">
             <a:avLst/>
@@ -5500,7 +5496,7 @@
         </p:spPr>
         <p:txBody>
           <a:bodyPr vert="horz" lIns="91440" tIns="45720" rIns="91440" bIns="45720" rtlCol="0" anchor="ctr">
-            <a:normAutofit fontScale="55000" lnSpcReduction="20000"/>
+            <a:normAutofit/>
           </a:bodyPr>
           <a:lstStyle>
             <a:lvl1pPr algn="l" defTabSz="914400" rtl="0" eaLnBrk="1" latinLnBrk="0" hangingPunct="1">
@@ -5523,7 +5519,7 @@
           </a:lstStyle>
           <a:p>
             <a:r>
-              <a:rPr lang="en-US" b="1" dirty="0">
+              <a:rPr lang="en-US" sz="3600" b="1" dirty="0">
                 <a:latin typeface="+mn-lt"/>
               </a:rPr>
               <a:t>Track:</a:t>
